--- a/연구자료/260508_AEC_SMI_Analysis.pptx
+++ b/연구자료/260508_AEC_SMI_Analysis.pptx
@@ -22939,7 +22939,7 @@
           <a:p>
             <a:r>
               <a:rPr lang="en-US" altLang="ko-KR" dirty="0"/>
-              <a:t>1D CNN </a:t>
+              <a:t>1D CNN(ResNet1D) </a:t>
             </a:r>
             <a:r>
               <a:rPr lang="ko-KR" altLang="en-US" dirty="0"/>
@@ -24113,37 +24113,6 @@
           <a:chExt cx="0" cy="0"/>
         </a:xfrm>
       </p:grpSpPr>
-      <p:pic>
-        <p:nvPicPr>
-          <p:cNvPr id="5" name="그림 4">
-            <a:extLst>
-              <a:ext uri="{FF2B5EF4-FFF2-40B4-BE49-F238E27FC236}">
-                <a16:creationId xmlns:a16="http://schemas.microsoft.com/office/drawing/2014/main" id="{CE8F4AE8-A20F-24FA-199D-3AA9CDE1F078}"/>
-              </a:ext>
-            </a:extLst>
-          </p:cNvPr>
-          <p:cNvPicPr>
-            <a:picLocks noChangeAspect="1"/>
-          </p:cNvPicPr>
-          <p:nvPr/>
-        </p:nvPicPr>
-        <p:blipFill>
-          <a:blip r:embed="rId3"/>
-          <a:srcRect t="9524"/>
-          <a:stretch>
-            <a:fillRect/>
-          </a:stretch>
-        </p:blipFill>
-        <p:spPr>
-          <a:xfrm>
-            <a:off x="2339058" y="1518882"/>
-            <a:ext cx="7513883" cy="4877561"/>
-          </a:xfrm>
-          <a:prstGeom prst="rect">
-            <a:avLst/>
-          </a:prstGeom>
-        </p:spPr>
-      </p:pic>
       <p:sp>
         <p:nvSpPr>
           <p:cNvPr id="2" name="제목 1">
@@ -24225,15 +24194,7 @@
           <a:p>
             <a:r>
               <a:rPr lang="en-US" altLang="ko-KR" dirty="0"/>
-              <a:t>1D CNN </a:t>
-            </a:r>
-            <a:r>
-              <a:rPr lang="ko-KR" altLang="en-US" dirty="0"/>
-              <a:t>성능 결과 비교 </a:t>
-            </a:r>
-            <a:r>
-              <a:rPr lang="en-US" altLang="ko-KR" dirty="0"/>
-              <a:t>- SMI</a:t>
+              <a:t>Only Clinic</a:t>
             </a:r>
           </a:p>
         </p:txBody>
@@ -24346,6 +24307,43 @@
           </a:p>
         </p:txBody>
       </p:sp>
+      <p:pic>
+        <p:nvPicPr>
+          <p:cNvPr id="7" name="그림 6">
+            <a:extLst>
+              <a:ext uri="{FF2B5EF4-FFF2-40B4-BE49-F238E27FC236}">
+                <a16:creationId xmlns:a16="http://schemas.microsoft.com/office/drawing/2014/main" id="{58D559E7-34C5-E900-69DD-01E416E612D3}"/>
+              </a:ext>
+            </a:extLst>
+          </p:cNvPr>
+          <p:cNvPicPr>
+            <a:picLocks noChangeAspect="1"/>
+          </p:cNvPicPr>
+          <p:nvPr/>
+        </p:nvPicPr>
+        <p:blipFill>
+          <a:blip r:embed="rId3">
+            <a:extLst>
+              <a:ext uri="{28A0092B-C50C-407E-A947-70E740481C1C}">
+                <a14:useLocalDpi xmlns:a14="http://schemas.microsoft.com/office/drawing/2010/main" val="0"/>
+              </a:ext>
+            </a:extLst>
+          </a:blip>
+          <a:srcRect t="9928"/>
+          <a:stretch>
+            <a:fillRect/>
+          </a:stretch>
+        </p:blipFill>
+        <p:spPr>
+          <a:xfrm>
+            <a:off x="2273150" y="1479430"/>
+            <a:ext cx="7645699" cy="4940964"/>
+          </a:xfrm>
+          <a:prstGeom prst="rect">
+            <a:avLst/>
+          </a:prstGeom>
+        </p:spPr>
+      </p:pic>
     </p:spTree>
     <p:extLst>
       <p:ext uri="{BB962C8B-B14F-4D97-AF65-F5344CB8AC3E}">
@@ -24384,10 +24382,10 @@
       </p:grpSpPr>
       <p:pic>
         <p:nvPicPr>
-          <p:cNvPr id="5" name="그림 4">
+          <p:cNvPr id="7" name="그림 6">
             <a:extLst>
               <a:ext uri="{FF2B5EF4-FFF2-40B4-BE49-F238E27FC236}">
-                <a16:creationId xmlns:a16="http://schemas.microsoft.com/office/drawing/2014/main" id="{4747ABA6-5670-A487-7EB3-BC1B11164430}"/>
+                <a16:creationId xmlns:a16="http://schemas.microsoft.com/office/drawing/2014/main" id="{4828F635-B992-09A1-2409-7147D2EA3C74}"/>
               </a:ext>
             </a:extLst>
           </p:cNvPr>
@@ -24397,16 +24395,22 @@
           <p:nvPr/>
         </p:nvPicPr>
         <p:blipFill>
-          <a:blip r:embed="rId3"/>
-          <a:srcRect t="9905"/>
+          <a:blip r:embed="rId3">
+            <a:extLst>
+              <a:ext uri="{28A0092B-C50C-407E-A947-70E740481C1C}">
+                <a14:useLocalDpi xmlns:a14="http://schemas.microsoft.com/office/drawing/2010/main" val="0"/>
+              </a:ext>
+            </a:extLst>
+          </a:blip>
+          <a:srcRect t="10088"/>
           <a:stretch>
             <a:fillRect/>
           </a:stretch>
         </p:blipFill>
         <p:spPr>
           <a:xfrm>
-            <a:off x="2313658" y="1429810"/>
-            <a:ext cx="7564684" cy="4889862"/>
+            <a:off x="2409765" y="1579052"/>
+            <a:ext cx="7372469" cy="4749438"/>
           </a:xfrm>
           <a:prstGeom prst="rect">
             <a:avLst/>
@@ -24643,37 +24647,6 @@
           <a:chExt cx="0" cy="0"/>
         </a:xfrm>
       </p:grpSpPr>
-      <p:pic>
-        <p:nvPicPr>
-          <p:cNvPr id="5" name="그림 4">
-            <a:extLst>
-              <a:ext uri="{FF2B5EF4-FFF2-40B4-BE49-F238E27FC236}">
-                <a16:creationId xmlns:a16="http://schemas.microsoft.com/office/drawing/2014/main" id="{4D6AEEB2-4235-8C5C-A7F4-ABE976CA0A59}"/>
-              </a:ext>
-            </a:extLst>
-          </p:cNvPr>
-          <p:cNvPicPr>
-            <a:picLocks noChangeAspect="1"/>
-          </p:cNvPicPr>
-          <p:nvPr/>
-        </p:nvPicPr>
-        <p:blipFill>
-          <a:blip r:embed="rId3"/>
-          <a:srcRect t="9269"/>
-          <a:stretch>
-            <a:fillRect/>
-          </a:stretch>
-        </p:blipFill>
-        <p:spPr>
-          <a:xfrm>
-            <a:off x="2256377" y="1429810"/>
-            <a:ext cx="7679245" cy="4998897"/>
-          </a:xfrm>
-          <a:prstGeom prst="rect">
-            <a:avLst/>
-          </a:prstGeom>
-        </p:spPr>
-      </p:pic>
       <p:sp>
         <p:nvSpPr>
           <p:cNvPr id="2" name="제목 1">
@@ -24868,6 +24841,43 @@
           </a:p>
         </p:txBody>
       </p:sp>
+      <p:pic>
+        <p:nvPicPr>
+          <p:cNvPr id="7" name="그림 6">
+            <a:extLst>
+              <a:ext uri="{FF2B5EF4-FFF2-40B4-BE49-F238E27FC236}">
+                <a16:creationId xmlns:a16="http://schemas.microsoft.com/office/drawing/2014/main" id="{E2D8325B-BAFB-27FF-4AB6-AC43FAF7A627}"/>
+              </a:ext>
+            </a:extLst>
+          </p:cNvPr>
+          <p:cNvPicPr>
+            <a:picLocks noChangeAspect="1"/>
+          </p:cNvPicPr>
+          <p:nvPr/>
+        </p:nvPicPr>
+        <p:blipFill>
+          <a:blip r:embed="rId3">
+            <a:extLst>
+              <a:ext uri="{28A0092B-C50C-407E-A947-70E740481C1C}">
+                <a14:useLocalDpi xmlns:a14="http://schemas.microsoft.com/office/drawing/2010/main" val="0"/>
+              </a:ext>
+            </a:extLst>
+          </a:blip>
+          <a:srcRect t="9927"/>
+          <a:stretch>
+            <a:fillRect/>
+          </a:stretch>
+        </p:blipFill>
+        <p:spPr>
+          <a:xfrm>
+            <a:off x="2332229" y="1495845"/>
+            <a:ext cx="7527541" cy="4864674"/>
+          </a:xfrm>
+          <a:prstGeom prst="rect">
+            <a:avLst/>
+          </a:prstGeom>
+        </p:spPr>
+      </p:pic>
     </p:spTree>
     <p:extLst>
       <p:ext uri="{BB962C8B-B14F-4D97-AF65-F5344CB8AC3E}">
@@ -24904,37 +24914,6 @@
           <a:chExt cx="0" cy="0"/>
         </a:xfrm>
       </p:grpSpPr>
-      <p:pic>
-        <p:nvPicPr>
-          <p:cNvPr id="5" name="그림 4">
-            <a:extLst>
-              <a:ext uri="{FF2B5EF4-FFF2-40B4-BE49-F238E27FC236}">
-                <a16:creationId xmlns:a16="http://schemas.microsoft.com/office/drawing/2014/main" id="{F8443477-99CE-1B59-9054-2CB061F290B4}"/>
-              </a:ext>
-            </a:extLst>
-          </p:cNvPr>
-          <p:cNvPicPr>
-            <a:picLocks noChangeAspect="1"/>
-          </p:cNvPicPr>
-          <p:nvPr/>
-        </p:nvPicPr>
-        <p:blipFill>
-          <a:blip r:embed="rId3"/>
-          <a:srcRect t="10038"/>
-          <a:stretch>
-            <a:fillRect/>
-          </a:stretch>
-        </p:blipFill>
-        <p:spPr>
-          <a:xfrm>
-            <a:off x="2432413" y="1621813"/>
-            <a:ext cx="7327174" cy="4729323"/>
-          </a:xfrm>
-          <a:prstGeom prst="rect">
-            <a:avLst/>
-          </a:prstGeom>
-        </p:spPr>
-      </p:pic>
       <p:sp>
         <p:nvSpPr>
           <p:cNvPr id="2" name="제목 1">
@@ -25129,6 +25108,43 @@
           </a:p>
         </p:txBody>
       </p:sp>
+      <p:pic>
+        <p:nvPicPr>
+          <p:cNvPr id="9" name="그림 8">
+            <a:extLst>
+              <a:ext uri="{FF2B5EF4-FFF2-40B4-BE49-F238E27FC236}">
+                <a16:creationId xmlns:a16="http://schemas.microsoft.com/office/drawing/2014/main" id="{3C282F7E-DE26-FE89-F304-409A987AD4F3}"/>
+              </a:ext>
+            </a:extLst>
+          </p:cNvPr>
+          <p:cNvPicPr>
+            <a:picLocks noChangeAspect="1"/>
+          </p:cNvPicPr>
+          <p:nvPr/>
+        </p:nvPicPr>
+        <p:blipFill>
+          <a:blip r:embed="rId3">
+            <a:extLst>
+              <a:ext uri="{28A0092B-C50C-407E-A947-70E740481C1C}">
+                <a14:useLocalDpi xmlns:a14="http://schemas.microsoft.com/office/drawing/2010/main" val="0"/>
+              </a:ext>
+            </a:extLst>
+          </a:blip>
+          <a:srcRect t="10332"/>
+          <a:stretch>
+            <a:fillRect/>
+          </a:stretch>
+        </p:blipFill>
+        <p:spPr>
+          <a:xfrm>
+            <a:off x="2360484" y="1576557"/>
+            <a:ext cx="7471031" cy="4806429"/>
+          </a:xfrm>
+          <a:prstGeom prst="rect">
+            <a:avLst/>
+          </a:prstGeom>
+        </p:spPr>
+      </p:pic>
     </p:spTree>
     <p:extLst>
       <p:ext uri="{BB962C8B-B14F-4D97-AF65-F5344CB8AC3E}">
@@ -25184,58 +25200,129 @@
           <a:p>
             <a:r>
               <a:rPr lang="en-US" altLang="ko-KR" dirty="0"/>
-              <a:t>BMI</a:t>
+              <a:t>Linear &amp; Logistic Regression </a:t>
             </a:r>
             <a:r>
               <a:rPr lang="ko-KR" altLang="en-US" dirty="0"/>
-              <a:t>를 </a:t>
+              <a:t>성능 비교 결과는 </a:t>
             </a:r>
             <a:r>
               <a:rPr lang="en-US" altLang="ko-KR" dirty="0"/>
-              <a:t>Clinic Data</a:t>
+              <a:t>AEC Feature</a:t>
             </a:r>
             <a:r>
               <a:rPr lang="ko-KR" altLang="en-US" dirty="0"/>
-              <a:t>에 포함하면 성능이 향상되는 것 확인</a:t>
+              <a:t>의 유무에 따른 성능 차이 없음</a:t>
+            </a:r>
+            <a:r>
+              <a:rPr lang="en-US" altLang="ko-KR" dirty="0"/>
+              <a:t>.</a:t>
+            </a:r>
+          </a:p>
+          <a:p>
+            <a:pPr lvl="1"/>
+            <a:r>
+              <a:rPr lang="en-US" altLang="ko-KR" dirty="0"/>
+              <a:t>AUC </a:t>
+            </a:r>
+            <a:r>
+              <a:rPr lang="ko-KR" altLang="en-US" dirty="0"/>
+              <a:t>기준 </a:t>
+            </a:r>
+            <a:r>
+              <a:rPr lang="en-US" altLang="ko-KR" dirty="0"/>
+              <a:t>0.7614 </a:t>
+            </a:r>
+            <a:r>
+              <a:rPr lang="ko-KR" altLang="en-US" dirty="0"/>
+              <a:t>→ </a:t>
+            </a:r>
+            <a:r>
+              <a:rPr lang="en-US" altLang="ko-KR" dirty="0"/>
+              <a:t>0.7623 </a:t>
+            </a:r>
+            <a:r>
+              <a:rPr lang="ko-KR" altLang="en-US" dirty="0"/>
+              <a:t>로 </a:t>
+            </a:r>
+            <a:r>
+              <a:rPr lang="el-GR" altLang="ko-KR" dirty="0"/>
+              <a:t>Δ</a:t>
+            </a:r>
+            <a:r>
+              <a:rPr lang="en-US" altLang="ko-KR" dirty="0"/>
+              <a:t>AUC = +0.0009 </a:t>
+            </a:r>
+            <a:r>
+              <a:rPr lang="ko-KR" altLang="en-US" dirty="0"/>
+              <a:t>향상</a:t>
             </a:r>
             <a:endParaRPr lang="en-US" altLang="ko-KR" dirty="0"/>
           </a:p>
           <a:p>
             <a:r>
+              <a:rPr lang="en-US" altLang="ko-KR" dirty="0"/>
+              <a:t>1D CNN</a:t>
+            </a:r>
+            <a:r>
               <a:rPr lang="ko-KR" altLang="en-US" dirty="0"/>
-              <a:t>하지만</a:t>
+              <a:t>에서의 성능 비교 결과는 </a:t>
             </a:r>
             <a:r>
               <a:rPr lang="en-US" altLang="ko-KR" dirty="0"/>
-              <a:t>, AEC</a:t>
+              <a:t>AEC Feature</a:t>
             </a:r>
             <a:r>
               <a:rPr lang="ko-KR" altLang="en-US" dirty="0"/>
-              <a:t>와 이외의 </a:t>
+              <a:t>의 유무에 따른 성능 차이 나타남</a:t>
             </a:r>
             <a:r>
               <a:rPr lang="en-US" altLang="ko-KR" dirty="0"/>
-              <a:t>feature</a:t>
+              <a:t>.</a:t>
+            </a:r>
+          </a:p>
+          <a:p>
+            <a:pPr lvl="1"/>
+            <a:r>
+              <a:rPr lang="en-US" altLang="ko-KR" dirty="0"/>
+              <a:t>AUC </a:t>
             </a:r>
             <a:r>
               <a:rPr lang="ko-KR" altLang="en-US" dirty="0"/>
-              <a:t>를 포함했을 때의 차이가 이전보다는 미비함</a:t>
+              <a:t>기준 </a:t>
+            </a:r>
+            <a:r>
+              <a:rPr lang="en-US" altLang="ko-KR" dirty="0"/>
+              <a:t>0.673 </a:t>
+            </a:r>
+            <a:r>
+              <a:rPr lang="ko-KR" altLang="en-US" dirty="0"/>
+              <a:t>→ </a:t>
+            </a:r>
+            <a:r>
+              <a:rPr lang="en-US" altLang="ko-KR" dirty="0"/>
+              <a:t>0.694 </a:t>
+            </a:r>
+            <a:r>
+              <a:rPr lang="ko-KR" altLang="en-US" dirty="0"/>
+              <a:t>로 </a:t>
+            </a:r>
+            <a:r>
+              <a:rPr lang="el-GR" altLang="ko-KR" dirty="0"/>
+              <a:t>Δ</a:t>
+            </a:r>
+            <a:r>
+              <a:rPr lang="en-US" altLang="ko-KR" dirty="0"/>
+              <a:t>AUC = +0.021 </a:t>
+            </a:r>
+            <a:r>
+              <a:rPr lang="ko-KR" altLang="en-US" dirty="0"/>
+              <a:t>향상</a:t>
             </a:r>
             <a:endParaRPr lang="en-US" altLang="ko-KR" dirty="0"/>
           </a:p>
           <a:p>
-            <a:r>
-              <a:rPr lang="ko-KR" altLang="en-US" dirty="0"/>
-              <a:t>외부 검증 결과 </a:t>
-            </a:r>
-            <a:r>
-              <a:rPr lang="en-US" altLang="ko-KR" dirty="0"/>
-              <a:t>Sensitivity</a:t>
-            </a:r>
-            <a:r>
-              <a:rPr lang="ko-KR" altLang="en-US"/>
-              <a:t>가 매우 낮음 </a:t>
-            </a:r>
+            <a:pPr lvl="1"/>
             <a:endParaRPr lang="en-US" altLang="ko-KR" dirty="0"/>
           </a:p>
         </p:txBody>
@@ -25359,54 +25446,15 @@
           <a:p>
             <a:r>
               <a:rPr lang="en-US" altLang="ko-KR" dirty="0"/>
-              <a:t>ML </a:t>
+              <a:t>1D CNN</a:t>
             </a:r>
             <a:r>
               <a:rPr lang="ko-KR" altLang="en-US" dirty="0"/>
-              <a:t>기반 앙상블 모델 비교 </a:t>
-            </a:r>
-            <a:r>
-              <a:rPr lang="en-US" altLang="ko-KR" dirty="0"/>
-              <a:t>(Random Forest, </a:t>
-            </a:r>
-            <a:r>
-              <a:rPr lang="en-US" altLang="ko-KR" dirty="0" err="1"/>
-              <a:t>XGBoost</a:t>
-            </a:r>
-            <a:r>
-              <a:rPr lang="en-US" altLang="ko-KR" dirty="0"/>
-              <a:t> </a:t>
-            </a:r>
-            <a:r>
-              <a:rPr lang="ko-KR" altLang="en-US" dirty="0"/>
-              <a:t>등</a:t>
-            </a:r>
-            <a:r>
-              <a:rPr lang="en-US" altLang="ko-KR" dirty="0"/>
-              <a:t>)</a:t>
-            </a:r>
-          </a:p>
-          <a:p>
-            <a:r>
-              <a:rPr lang="ko-KR" altLang="en-US" dirty="0"/>
-              <a:t>추후 </a:t>
-            </a:r>
-            <a:r>
-              <a:rPr lang="en-US" altLang="ko-KR" dirty="0"/>
-              <a:t>SMI(TAMA/Height</a:t>
-            </a:r>
-            <a:r>
-              <a:rPr lang="en-US" altLang="ko-KR" baseline="30000" dirty="0"/>
-              <a:t>2</a:t>
-            </a:r>
-            <a:r>
-              <a:rPr lang="en-US" altLang="ko-KR" dirty="0"/>
-              <a:t>)</a:t>
-            </a:r>
-            <a:r>
-              <a:rPr lang="ko-KR" altLang="en-US" dirty="0"/>
-              <a:t>도 활용 가능</a:t>
-            </a:r>
+              <a:t>에 대한 알고리즘 최적화 진행</a:t>
+            </a:r>
+            <a:endParaRPr lang="en-US" altLang="ko-KR" dirty="0"/>
+          </a:p>
+          <a:p>
             <a:endParaRPr lang="en-US" altLang="ko-KR" dirty="0"/>
           </a:p>
         </p:txBody>

--- a/연구자료/260508_AEC_SMI_Analysis.pptx
+++ b/연구자료/260508_AEC_SMI_Analysis.pptx
@@ -9438,7 +9438,7 @@
                 <a:ea typeface="KoPub돋움체 Bold" panose="00000800000000000000" pitchFamily="2" charset="-127"/>
                 <a:cs typeface="Arial" panose="020B0604020202020204" pitchFamily="34" charset="0"/>
               </a:rPr>
-              <a:t>Linear &amp; Logistic Regression</a:t>
+              <a:t>Regression &amp; 1D CNN Result Comparison with AEC, SMI</a:t>
             </a:r>
           </a:p>
         </p:txBody>
